--- a/site/clases/parte-5-ingenieria-de-datos/210-pyspark-para-datasets-grandes/clase-210-pyspark-para-datasets-grandes-presentacion.pptx
+++ b/site/clases/parte-5-ingenieria-de-datos/210-pyspark-para-datasets-grandes/clase-210-pyspark-para-datasets-grandes-presentacion.pptx
@@ -3272,7 +3272,7 @@
                 </a:solidFill>
                 <a:latin typeface="Segoe UI"/>
               </a:rPr>
-              <a:t>Parte: 5 — Ingeniería de Datos · Fuente: Chambers &amp; Zaharia Spark: The Definitive Guide (O'Reilly, 2018) + PySpark docs 3.5+.  Duración estimada: 90 min.</a:t>
+              <a:t>Parte: 5 — Ingeniería de Datos · Fuente: Chambers &amp; Zaharia Spark: The Definitive Guide (O'Reilly, 2018) + PySpark docs 3.5+.  Duración estimada: 90 min. · Nivel: Intermedio-Avanzado</a:t>
             </a:r>
           </a:p>
         </p:txBody>
@@ -3581,7 +3581,7 @@
                 </a:solidFill>
                 <a:latin typeface="Segoe UI"/>
               </a:rPr>
-              <a:t>Parte: 5 — Ingeniería de Datos · Fuente: Chambers &amp; Zaharia Spark: The Definitive Guide (O'Reilly, 2018) + PySpark docs 3.5+.  Duración estimada: 90 min.</a:t>
+              <a:t>Parte: 5 — Ingeniería de Datos · Fuente: Chambers &amp; Zaharia Spark: The Definitive Guide (O'Reilly, 2018) + PySpark docs 3.5+.  Duración estimada: 90 min. · Nivel: Intermedio-Avanzado</a:t>
             </a:r>
           </a:p>
         </p:txBody>
@@ -4823,7 +4823,7 @@
                 </a:solidFill>
                 <a:latin typeface="Segoe UI"/>
               </a:rPr>
-              <a:t>Requiere: pip install pyspark==3.5.3. Usaremos modo local con todos los cores.</a:t>
+              <a:t>PySpark es "pandas que corre repartido en muchas máquinas". Escribís código casi idéntico al de pandas (df.filter(...).groupBy(...).agg(...)), pero por debajo Spark parte el dataset en trozos, los reparte entre varios workers y procesa cada trozo en</a:t>
             </a:r>
           </a:p>
         </p:txBody>
